--- a/docs/CLIENT_DECK.pptx
+++ b/docs/CLIENT_DECK.pptx
@@ -4199,7 +4199,7 @@
                 </a:solidFill>
                 <a:latin typeface="Courier New"/>
               </a:rPr>
-              <a:t>H2A  ·  HYBRIS TO SALESFORCE</a:t>
+              <a:t>PORTAGE  ·  HYBRIS TO SALESFORCE</a:t>
             </a:r>
           </a:p>
         </p:txBody>
@@ -4473,7 +4473,7 @@
                 </a:solidFill>
                 <a:latin typeface="Courier New"/>
               </a:rPr>
-              <a:t>H2A  ·  HYBRIS TO SALESFORCE</a:t>
+              <a:t>PORTAGE  ·  HYBRIS TO SALESFORCE</a:t>
             </a:r>
           </a:p>
         </p:txBody>
@@ -5894,7 +5894,7 @@
                 </a:solidFill>
                 <a:latin typeface="Courier New"/>
               </a:rPr>
-              <a:t>H2A  ·  HYBRIS TO SALESFORCE</a:t>
+              <a:t>PORTAGE  ·  HYBRIS TO SALESFORCE</a:t>
             </a:r>
           </a:p>
         </p:txBody>
@@ -7888,7 +7888,7 @@
                 </a:solidFill>
                 <a:latin typeface="Courier New"/>
               </a:rPr>
-              <a:t>H2A  ·  HYBRIS TO SALESFORCE</a:t>
+              <a:t>PORTAGE  ·  HYBRIS TO SALESFORCE</a:t>
             </a:r>
           </a:p>
         </p:txBody>
@@ -9815,7 +9815,7 @@
                 </a:solidFill>
                 <a:latin typeface="Courier New"/>
               </a:rPr>
-              <a:t>H2A  ·  HYBRIS TO SALESFORCE</a:t>
+              <a:t>PORTAGE  ·  HYBRIS TO SALESFORCE</a:t>
             </a:r>
           </a:p>
         </p:txBody>
